--- a/assets/powerpoints/module-travail/A2-le-e-ferme-et-le-e-ouvert.pptx
+++ b/assets/powerpoints/module-travail/A2-le-e-ferme-et-le-e-ouvert.pptx
@@ -4578,7 +4578,7 @@
                 </a:solidFill>
                 <a:latin typeface="Verdana"/>
               </a:rPr>
-              <a:t>SÉANCE A2  ·  MODULE 3</a:t>
+              <a:t>SÉANCE A2  ·  MODULE 4</a:t>
             </a:r>
           </a:p>
         </p:txBody>

--- a/assets/powerpoints/module-travail/A2-le-e-ferme-et-le-e-ouvert.pptx
+++ b/assets/powerpoints/module-travail/A2-le-e-ferme-et-le-e-ouvert.pptx
@@ -4574,7 +4574,7 @@
             <a:r>
               <a:rPr sz="1300" b="1" i="0" spc="156">
                 <a:solidFill>
-                  <a:srgbClr val="6B4FBB"/>
+                  <a:srgbClr val="3B49A0"/>
                 </a:solidFill>
                 <a:latin typeface="Verdana"/>
               </a:rPr>
@@ -4914,7 +4914,7 @@
             <a:r>
               <a:rPr sz="1300" b="1" i="0" spc="156">
                 <a:solidFill>
-                  <a:srgbClr val="6B4FBB"/>
+                  <a:srgbClr val="3B49A0"/>
                 </a:solidFill>
                 <a:latin typeface="Verdana"/>
               </a:rPr>
@@ -5463,7 +5463,7 @@
             <a:r>
               <a:rPr sz="1300" b="1" i="0" spc="156">
                 <a:solidFill>
-                  <a:srgbClr val="6B4FBB"/>
+                  <a:srgbClr val="3B49A0"/>
                 </a:solidFill>
                 <a:latin typeface="Verdana"/>
               </a:rPr>
@@ -5613,7 +5613,7 @@
             </a:avLst>
           </a:prstGeom>
           <a:solidFill>
-            <a:srgbClr val="EFEAFA"/>
+            <a:srgbClr val="E8EAFA"/>
           </a:solidFill>
           <a:ln>
             <a:noFill/>
@@ -5670,7 +5670,7 @@
             <a:r>
               <a:rPr sz="1500" b="1" i="0">
                 <a:solidFill>
-                  <a:srgbClr val="6B4FBB"/>
+                  <a:srgbClr val="3B49A0"/>
                 </a:solidFill>
                 <a:latin typeface="Verdana"/>
               </a:rPr>
@@ -5781,7 +5781,7 @@
             </a:avLst>
           </a:prstGeom>
           <a:solidFill>
-            <a:srgbClr val="EFEAFA"/>
+            <a:srgbClr val="E8EAFA"/>
           </a:solidFill>
           <a:ln>
             <a:noFill/>
@@ -5838,7 +5838,7 @@
             <a:r>
               <a:rPr sz="1500" b="1" i="0">
                 <a:solidFill>
-                  <a:srgbClr val="6B4FBB"/>
+                  <a:srgbClr val="3B49A0"/>
                 </a:solidFill>
                 <a:latin typeface="Verdana"/>
               </a:rPr>
@@ -5949,7 +5949,7 @@
             </a:avLst>
           </a:prstGeom>
           <a:solidFill>
-            <a:srgbClr val="EFEAFA"/>
+            <a:srgbClr val="E8EAFA"/>
           </a:solidFill>
           <a:ln>
             <a:noFill/>
@@ -6006,7 +6006,7 @@
             <a:r>
               <a:rPr sz="1500" b="1" i="0">
                 <a:solidFill>
-                  <a:srgbClr val="6B4FBB"/>
+                  <a:srgbClr val="3B49A0"/>
                 </a:solidFill>
                 <a:latin typeface="Verdana"/>
               </a:rPr>
@@ -6117,7 +6117,7 @@
             </a:avLst>
           </a:prstGeom>
           <a:solidFill>
-            <a:srgbClr val="EFEAFA"/>
+            <a:srgbClr val="E8EAFA"/>
           </a:solidFill>
           <a:ln>
             <a:noFill/>
@@ -6174,7 +6174,7 @@
             <a:r>
               <a:rPr sz="1500" b="1" i="0">
                 <a:solidFill>
-                  <a:srgbClr val="6B4FBB"/>
+                  <a:srgbClr val="3B49A0"/>
                 </a:solidFill>
                 <a:latin typeface="Verdana"/>
               </a:rPr>
@@ -6285,7 +6285,7 @@
             </a:avLst>
           </a:prstGeom>
           <a:solidFill>
-            <a:srgbClr val="EFEAFA"/>
+            <a:srgbClr val="E8EAFA"/>
           </a:solidFill>
           <a:ln>
             <a:noFill/>
@@ -6342,7 +6342,7 @@
             <a:r>
               <a:rPr sz="1500" b="1" i="0">
                 <a:solidFill>
-                  <a:srgbClr val="6B4FBB"/>
+                  <a:srgbClr val="3B49A0"/>
                 </a:solidFill>
                 <a:latin typeface="Verdana"/>
               </a:rPr>
@@ -6453,7 +6453,7 @@
             </a:avLst>
           </a:prstGeom>
           <a:solidFill>
-            <a:srgbClr val="EFEAFA"/>
+            <a:srgbClr val="E8EAFA"/>
           </a:solidFill>
           <a:ln>
             <a:noFill/>
@@ -6510,7 +6510,7 @@
             <a:r>
               <a:rPr sz="1500" b="1" i="0">
                 <a:solidFill>
-                  <a:srgbClr val="6B4FBB"/>
+                  <a:srgbClr val="3B49A0"/>
                 </a:solidFill>
                 <a:latin typeface="Verdana"/>
               </a:rPr>
@@ -6726,7 +6726,7 @@
             <a:r>
               <a:rPr sz="1300" b="1" i="0" spc="156">
                 <a:solidFill>
-                  <a:srgbClr val="6B4FBB"/>
+                  <a:srgbClr val="3B49A0"/>
                 </a:solidFill>
                 <a:latin typeface="Verdana"/>
               </a:rPr>
@@ -6876,7 +6876,7 @@
             </a:avLst>
           </a:prstGeom>
           <a:solidFill>
-            <a:srgbClr val="EFEAFA"/>
+            <a:srgbClr val="E8EAFA"/>
           </a:solidFill>
           <a:ln>
             <a:noFill/>
@@ -6933,7 +6933,7 @@
             <a:r>
               <a:rPr sz="1500" b="1" i="0">
                 <a:solidFill>
-                  <a:srgbClr val="6B4FBB"/>
+                  <a:srgbClr val="3B49A0"/>
                 </a:solidFill>
                 <a:latin typeface="Verdana"/>
               </a:rPr>
@@ -7053,7 +7053,7 @@
             </a:avLst>
           </a:prstGeom>
           <a:solidFill>
-            <a:srgbClr val="EFEAFA"/>
+            <a:srgbClr val="E8EAFA"/>
           </a:solidFill>
           <a:ln>
             <a:noFill/>
@@ -7110,7 +7110,7 @@
             <a:r>
               <a:rPr sz="1500" b="1" i="0">
                 <a:solidFill>
-                  <a:srgbClr val="6B4FBB"/>
+                  <a:srgbClr val="3B49A0"/>
                 </a:solidFill>
                 <a:latin typeface="Verdana"/>
               </a:rPr>
@@ -7230,7 +7230,7 @@
             </a:avLst>
           </a:prstGeom>
           <a:solidFill>
-            <a:srgbClr val="EFEAFA"/>
+            <a:srgbClr val="E8EAFA"/>
           </a:solidFill>
           <a:ln>
             <a:noFill/>
@@ -7287,7 +7287,7 @@
             <a:r>
               <a:rPr sz="1500" b="1" i="0">
                 <a:solidFill>
-                  <a:srgbClr val="6B4FBB"/>
+                  <a:srgbClr val="3B49A0"/>
                 </a:solidFill>
                 <a:latin typeface="Verdana"/>
               </a:rPr>
@@ -7407,7 +7407,7 @@
             </a:avLst>
           </a:prstGeom>
           <a:solidFill>
-            <a:srgbClr val="EFEAFA"/>
+            <a:srgbClr val="E8EAFA"/>
           </a:solidFill>
           <a:ln>
             <a:noFill/>
@@ -7464,7 +7464,7 @@
             <a:r>
               <a:rPr sz="1500" b="1" i="0">
                 <a:solidFill>
-                  <a:srgbClr val="6B4FBB"/>
+                  <a:srgbClr val="3B49A0"/>
                 </a:solidFill>
                 <a:latin typeface="Verdana"/>
               </a:rPr>
@@ -7584,7 +7584,7 @@
             </a:avLst>
           </a:prstGeom>
           <a:solidFill>
-            <a:srgbClr val="EFEAFA"/>
+            <a:srgbClr val="E8EAFA"/>
           </a:solidFill>
           <a:ln>
             <a:noFill/>
@@ -7641,7 +7641,7 @@
             <a:r>
               <a:rPr sz="1500" b="1" i="0">
                 <a:solidFill>
-                  <a:srgbClr val="6B4FBB"/>
+                  <a:srgbClr val="3B49A0"/>
                 </a:solidFill>
                 <a:latin typeface="Verdana"/>
               </a:rPr>
@@ -7761,7 +7761,7 @@
             </a:avLst>
           </a:prstGeom>
           <a:solidFill>
-            <a:srgbClr val="EFEAFA"/>
+            <a:srgbClr val="E8EAFA"/>
           </a:solidFill>
           <a:ln>
             <a:noFill/>
@@ -7818,7 +7818,7 @@
             <a:r>
               <a:rPr sz="1500" b="1" i="0">
                 <a:solidFill>
-                  <a:srgbClr val="6B4FBB"/>
+                  <a:srgbClr val="3B49A0"/>
                 </a:solidFill>
                 <a:latin typeface="Verdana"/>
               </a:rPr>
@@ -8043,7 +8043,7 @@
             <a:r>
               <a:rPr sz="1300" b="1" i="0" spc="156">
                 <a:solidFill>
-                  <a:srgbClr val="6B4FBB"/>
+                  <a:srgbClr val="3B49A0"/>
                 </a:solidFill>
                 <a:latin typeface="Verdana"/>
               </a:rPr>
@@ -8193,7 +8193,7 @@
             </a:avLst>
           </a:prstGeom>
           <a:solidFill>
-            <a:srgbClr val="EFEAFA"/>
+            <a:srgbClr val="E8EAFA"/>
           </a:solidFill>
           <a:ln>
             <a:noFill/>
@@ -8250,7 +8250,7 @@
             <a:r>
               <a:rPr sz="1500" b="1" i="0">
                 <a:solidFill>
-                  <a:srgbClr val="6B4FBB"/>
+                  <a:srgbClr val="3B49A0"/>
                 </a:solidFill>
                 <a:latin typeface="Verdana"/>
               </a:rPr>
@@ -8361,7 +8361,7 @@
             </a:avLst>
           </a:prstGeom>
           <a:solidFill>
-            <a:srgbClr val="EFEAFA"/>
+            <a:srgbClr val="E8EAFA"/>
           </a:solidFill>
           <a:ln>
             <a:noFill/>
@@ -8418,7 +8418,7 @@
             <a:r>
               <a:rPr sz="1500" b="1" i="0">
                 <a:solidFill>
-                  <a:srgbClr val="6B4FBB"/>
+                  <a:srgbClr val="3B49A0"/>
                 </a:solidFill>
                 <a:latin typeface="Verdana"/>
               </a:rPr>
@@ -8529,7 +8529,7 @@
             </a:avLst>
           </a:prstGeom>
           <a:solidFill>
-            <a:srgbClr val="EFEAFA"/>
+            <a:srgbClr val="E8EAFA"/>
           </a:solidFill>
           <a:ln>
             <a:noFill/>
@@ -8586,7 +8586,7 @@
             <a:r>
               <a:rPr sz="1500" b="1" i="0">
                 <a:solidFill>
-                  <a:srgbClr val="6B4FBB"/>
+                  <a:srgbClr val="3B49A0"/>
                 </a:solidFill>
                 <a:latin typeface="Verdana"/>
               </a:rPr>
@@ -8802,7 +8802,7 @@
             <a:r>
               <a:rPr sz="1300" b="1" i="0" spc="156">
                 <a:solidFill>
-                  <a:srgbClr val="6B4FBB"/>
+                  <a:srgbClr val="3B49A0"/>
                 </a:solidFill>
                 <a:latin typeface="Verdana"/>
               </a:rPr>
@@ -8952,7 +8952,7 @@
             </a:avLst>
           </a:prstGeom>
           <a:solidFill>
-            <a:srgbClr val="EFEAFA"/>
+            <a:srgbClr val="E8EAFA"/>
           </a:solidFill>
           <a:ln>
             <a:noFill/>
@@ -9009,7 +9009,7 @@
             <a:r>
               <a:rPr sz="1500" b="1" i="0">
                 <a:solidFill>
-                  <a:srgbClr val="6B4FBB"/>
+                  <a:srgbClr val="3B49A0"/>
                 </a:solidFill>
                 <a:latin typeface="Verdana"/>
               </a:rPr>
@@ -9129,7 +9129,7 @@
             </a:avLst>
           </a:prstGeom>
           <a:solidFill>
-            <a:srgbClr val="EFEAFA"/>
+            <a:srgbClr val="E8EAFA"/>
           </a:solidFill>
           <a:ln>
             <a:noFill/>
@@ -9186,7 +9186,7 @@
             <a:r>
               <a:rPr sz="1500" b="1" i="0">
                 <a:solidFill>
-                  <a:srgbClr val="6B4FBB"/>
+                  <a:srgbClr val="3B49A0"/>
                 </a:solidFill>
                 <a:latin typeface="Verdana"/>
               </a:rPr>
@@ -9306,7 +9306,7 @@
             </a:avLst>
           </a:prstGeom>
           <a:solidFill>
-            <a:srgbClr val="EFEAFA"/>
+            <a:srgbClr val="E8EAFA"/>
           </a:solidFill>
           <a:ln>
             <a:noFill/>
@@ -9363,7 +9363,7 @@
             <a:r>
               <a:rPr sz="1500" b="1" i="0">
                 <a:solidFill>
-                  <a:srgbClr val="6B4FBB"/>
+                  <a:srgbClr val="3B49A0"/>
                 </a:solidFill>
                 <a:latin typeface="Verdana"/>
               </a:rPr>
@@ -10051,7 +10051,7 @@
             <a:r>
               <a:rPr sz="1300" b="1" i="0" spc="156">
                 <a:solidFill>
-                  <a:srgbClr val="6B4FBB"/>
+                  <a:srgbClr val="3B49A0"/>
                 </a:solidFill>
                 <a:latin typeface="Verdana"/>
               </a:rPr>
@@ -10162,7 +10162,7 @@
             </a:avLst>
           </a:prstGeom>
           <a:solidFill>
-            <a:srgbClr val="EFEAFA"/>
+            <a:srgbClr val="E8EAFA"/>
           </a:solidFill>
           <a:ln>
             <a:noFill/>
@@ -10219,7 +10219,7 @@
             <a:r>
               <a:rPr sz="1500" b="1" i="0">
                 <a:solidFill>
-                  <a:srgbClr val="6B4FBB"/>
+                  <a:srgbClr val="3B49A0"/>
                 </a:solidFill>
                 <a:latin typeface="Verdana"/>
               </a:rPr>
@@ -10330,7 +10330,7 @@
             </a:avLst>
           </a:prstGeom>
           <a:solidFill>
-            <a:srgbClr val="EFEAFA"/>
+            <a:srgbClr val="E8EAFA"/>
           </a:solidFill>
           <a:ln>
             <a:noFill/>
@@ -10387,7 +10387,7 @@
             <a:r>
               <a:rPr sz="1500" b="1" i="0">
                 <a:solidFill>
-                  <a:srgbClr val="6B4FBB"/>
+                  <a:srgbClr val="3B49A0"/>
                 </a:solidFill>
                 <a:latin typeface="Verdana"/>
               </a:rPr>
@@ -10498,7 +10498,7 @@
             </a:avLst>
           </a:prstGeom>
           <a:solidFill>
-            <a:srgbClr val="EFEAFA"/>
+            <a:srgbClr val="E8EAFA"/>
           </a:solidFill>
           <a:ln>
             <a:noFill/>
@@ -10555,7 +10555,7 @@
             <a:r>
               <a:rPr sz="1500" b="1" i="0">
                 <a:solidFill>
-                  <a:srgbClr val="6B4FBB"/>
+                  <a:srgbClr val="3B49A0"/>
                 </a:solidFill>
                 <a:latin typeface="Verdana"/>
               </a:rPr>
@@ -10666,7 +10666,7 @@
             </a:avLst>
           </a:prstGeom>
           <a:solidFill>
-            <a:srgbClr val="EFEAFA"/>
+            <a:srgbClr val="E8EAFA"/>
           </a:solidFill>
           <a:ln>
             <a:noFill/>
@@ -10723,7 +10723,7 @@
             <a:r>
               <a:rPr sz="1500" b="1" i="0">
                 <a:solidFill>
-                  <a:srgbClr val="6B4FBB"/>
+                  <a:srgbClr val="3B49A0"/>
                 </a:solidFill>
                 <a:latin typeface="Verdana"/>
               </a:rPr>
@@ -10939,7 +10939,7 @@
             <a:r>
               <a:rPr sz="1300" b="1" i="0" spc="156">
                 <a:solidFill>
-                  <a:srgbClr val="6B4FBB"/>
+                  <a:srgbClr val="3B49A0"/>
                 </a:solidFill>
                 <a:latin typeface="Verdana"/>
               </a:rPr>
@@ -10965,7 +10965,7 @@
             </a:avLst>
           </a:prstGeom>
           <a:solidFill>
-            <a:srgbClr val="EFEAFA"/>
+            <a:srgbClr val="E8EAFA"/>
           </a:solidFill>
           <a:ln w="12700">
             <a:solidFill>
@@ -11286,7 +11286,7 @@
             <a:r>
               <a:rPr sz="1300" b="1" i="0" spc="156">
                 <a:solidFill>
-                  <a:srgbClr val="6B4FBB"/>
+                  <a:srgbClr val="3B49A0"/>
                 </a:solidFill>
                 <a:latin typeface="Verdana"/>
               </a:rPr>
@@ -11527,7 +11527,7 @@
             <a:r>
               <a:rPr sz="1800" b="1" i="0">
                 <a:solidFill>
-                  <a:srgbClr val="6B4FBB"/>
+                  <a:srgbClr val="3B49A0"/>
                 </a:solidFill>
                 <a:latin typeface="Verdana"/>
               </a:rPr>
@@ -11686,7 +11686,7 @@
             <a:r>
               <a:rPr sz="1800" b="1" i="0">
                 <a:solidFill>
-                  <a:srgbClr val="6B4FBB"/>
+                  <a:srgbClr val="3B49A0"/>
                 </a:solidFill>
                 <a:latin typeface="Verdana"/>
               </a:rPr>
@@ -12026,7 +12026,7 @@
             <a:r>
               <a:rPr sz="1300" b="1" i="0" spc="156">
                 <a:solidFill>
-                  <a:srgbClr val="6B4FBB"/>
+                  <a:srgbClr val="3B49A0"/>
                 </a:solidFill>
                 <a:latin typeface="Verdana"/>
               </a:rPr>
@@ -12150,7 +12150,7 @@
             <a:r>
               <a:rPr sz="2400" b="1" i="0">
                 <a:solidFill>
-                  <a:srgbClr val="6B4FBB"/>
+                  <a:srgbClr val="3B49A0"/>
                 </a:solidFill>
                 <a:latin typeface="Verdana"/>
               </a:rPr>
@@ -12274,7 +12274,7 @@
             <a:r>
               <a:rPr sz="2400" b="1" i="0">
                 <a:solidFill>
-                  <a:srgbClr val="6B4FBB"/>
+                  <a:srgbClr val="3B49A0"/>
                 </a:solidFill>
                 <a:latin typeface="Verdana"/>
               </a:rPr>
@@ -12398,7 +12398,7 @@
             <a:r>
               <a:rPr sz="2400" b="1" i="0">
                 <a:solidFill>
-                  <a:srgbClr val="6B4FBB"/>
+                  <a:srgbClr val="3B49A0"/>
                 </a:solidFill>
                 <a:latin typeface="Verdana"/>
               </a:rPr>
@@ -12522,7 +12522,7 @@
             <a:r>
               <a:rPr sz="2400" b="1" i="0">
                 <a:solidFill>
-                  <a:srgbClr val="6B4FBB"/>
+                  <a:srgbClr val="3B49A0"/>
                 </a:solidFill>
                 <a:latin typeface="Verdana"/>
               </a:rPr>
@@ -12738,7 +12738,7 @@
             <a:r>
               <a:rPr sz="1300" b="1" i="0" spc="156">
                 <a:solidFill>
-                  <a:srgbClr val="6B4FBB"/>
+                  <a:srgbClr val="3B49A0"/>
                 </a:solidFill>
                 <a:latin typeface="Verdana"/>
               </a:rPr>
@@ -12940,7 +12940,7 @@
             <a:r>
               <a:rPr sz="1700" b="1" i="0">
                 <a:solidFill>
-                  <a:srgbClr val="6B4FBB"/>
+                  <a:srgbClr val="3B49A0"/>
                 </a:solidFill>
                 <a:latin typeface="Verdana"/>
               </a:rPr>
@@ -13060,7 +13060,7 @@
             <a:r>
               <a:rPr sz="1700" b="1" i="0">
                 <a:solidFill>
-                  <a:srgbClr val="6B4FBB"/>
+                  <a:srgbClr val="3B49A0"/>
                 </a:solidFill>
                 <a:latin typeface="Verdana"/>
               </a:rPr>
@@ -13180,7 +13180,7 @@
             <a:r>
               <a:rPr sz="1700" b="1" i="0">
                 <a:solidFill>
-                  <a:srgbClr val="6B4FBB"/>
+                  <a:srgbClr val="3B49A0"/>
                 </a:solidFill>
                 <a:latin typeface="Verdana"/>
               </a:rPr>
@@ -13300,7 +13300,7 @@
             <a:r>
               <a:rPr sz="1700" b="1" i="0">
                 <a:solidFill>
-                  <a:srgbClr val="6B4FBB"/>
+                  <a:srgbClr val="3B49A0"/>
                 </a:solidFill>
                 <a:latin typeface="Verdana"/>
               </a:rPr>
@@ -13420,7 +13420,7 @@
             <a:r>
               <a:rPr sz="1700" b="1" i="0">
                 <a:solidFill>
-                  <a:srgbClr val="6B4FBB"/>
+                  <a:srgbClr val="3B49A0"/>
                 </a:solidFill>
                 <a:latin typeface="Verdana"/>
               </a:rPr>
@@ -13721,7 +13721,7 @@
             <a:r>
               <a:rPr sz="1300" b="1" i="0" spc="156">
                 <a:solidFill>
-                  <a:srgbClr val="6B4FBB"/>
+                  <a:srgbClr val="3B49A0"/>
                 </a:solidFill>
                 <a:latin typeface="Verdana"/>
               </a:rPr>
@@ -13871,7 +13871,7 @@
             </a:avLst>
           </a:prstGeom>
           <a:solidFill>
-            <a:srgbClr val="EFEAFA"/>
+            <a:srgbClr val="E8EAFA"/>
           </a:solidFill>
           <a:ln>
             <a:noFill/>
@@ -13928,7 +13928,7 @@
             <a:r>
               <a:rPr sz="1500" b="1" i="0">
                 <a:solidFill>
-                  <a:srgbClr val="6B4FBB"/>
+                  <a:srgbClr val="3B49A0"/>
                 </a:solidFill>
                 <a:latin typeface="Verdana"/>
               </a:rPr>
@@ -14039,7 +14039,7 @@
             </a:avLst>
           </a:prstGeom>
           <a:solidFill>
-            <a:srgbClr val="EFEAFA"/>
+            <a:srgbClr val="E8EAFA"/>
           </a:solidFill>
           <a:ln>
             <a:noFill/>
@@ -14096,7 +14096,7 @@
             <a:r>
               <a:rPr sz="1500" b="1" i="0">
                 <a:solidFill>
-                  <a:srgbClr val="6B4FBB"/>
+                  <a:srgbClr val="3B49A0"/>
                 </a:solidFill>
                 <a:latin typeface="Verdana"/>
               </a:rPr>
@@ -14207,7 +14207,7 @@
             </a:avLst>
           </a:prstGeom>
           <a:solidFill>
-            <a:srgbClr val="EFEAFA"/>
+            <a:srgbClr val="E8EAFA"/>
           </a:solidFill>
           <a:ln>
             <a:noFill/>
@@ -14264,7 +14264,7 @@
             <a:r>
               <a:rPr sz="1500" b="1" i="0">
                 <a:solidFill>
-                  <a:srgbClr val="6B4FBB"/>
+                  <a:srgbClr val="3B49A0"/>
                 </a:solidFill>
                 <a:latin typeface="Verdana"/>
               </a:rPr>
@@ -14375,7 +14375,7 @@
             </a:avLst>
           </a:prstGeom>
           <a:solidFill>
-            <a:srgbClr val="EFEAFA"/>
+            <a:srgbClr val="E8EAFA"/>
           </a:solidFill>
           <a:ln>
             <a:noFill/>
@@ -14432,7 +14432,7 @@
             <a:r>
               <a:rPr sz="1500" b="1" i="0">
                 <a:solidFill>
-                  <a:srgbClr val="6B4FBB"/>
+                  <a:srgbClr val="3B49A0"/>
                 </a:solidFill>
                 <a:latin typeface="Verdana"/>
               </a:rPr>
@@ -14543,7 +14543,7 @@
             </a:avLst>
           </a:prstGeom>
           <a:solidFill>
-            <a:srgbClr val="EFEAFA"/>
+            <a:srgbClr val="E8EAFA"/>
           </a:solidFill>
           <a:ln>
             <a:noFill/>
@@ -14600,7 +14600,7 @@
             <a:r>
               <a:rPr sz="1500" b="1" i="0">
                 <a:solidFill>
-                  <a:srgbClr val="6B4FBB"/>
+                  <a:srgbClr val="3B49A0"/>
                 </a:solidFill>
                 <a:latin typeface="Verdana"/>
               </a:rPr>
@@ -14711,7 +14711,7 @@
             </a:avLst>
           </a:prstGeom>
           <a:solidFill>
-            <a:srgbClr val="EFEAFA"/>
+            <a:srgbClr val="E8EAFA"/>
           </a:solidFill>
           <a:ln>
             <a:noFill/>
@@ -14768,7 +14768,7 @@
             <a:r>
               <a:rPr sz="1500" b="1" i="0">
                 <a:solidFill>
-                  <a:srgbClr val="6B4FBB"/>
+                  <a:srgbClr val="3B49A0"/>
                 </a:solidFill>
                 <a:latin typeface="Verdana"/>
               </a:rPr>
@@ -14879,7 +14879,7 @@
             </a:avLst>
           </a:prstGeom>
           <a:solidFill>
-            <a:srgbClr val="EFEAFA"/>
+            <a:srgbClr val="E8EAFA"/>
           </a:solidFill>
           <a:ln>
             <a:noFill/>
@@ -14936,7 +14936,7 @@
             <a:r>
               <a:rPr sz="1500" b="1" i="0">
                 <a:solidFill>
-                  <a:srgbClr val="6B4FBB"/>
+                  <a:srgbClr val="3B49A0"/>
                 </a:solidFill>
                 <a:latin typeface="Verdana"/>
               </a:rPr>
@@ -15047,7 +15047,7 @@
             </a:avLst>
           </a:prstGeom>
           <a:solidFill>
-            <a:srgbClr val="EFEAFA"/>
+            <a:srgbClr val="E8EAFA"/>
           </a:solidFill>
           <a:ln>
             <a:noFill/>
@@ -15104,7 +15104,7 @@
             <a:r>
               <a:rPr sz="1500" b="1" i="0">
                 <a:solidFill>
-                  <a:srgbClr val="6B4FBB"/>
+                  <a:srgbClr val="3B49A0"/>
                 </a:solidFill>
                 <a:latin typeface="Verdana"/>
               </a:rPr>
@@ -15320,7 +15320,7 @@
             <a:r>
               <a:rPr sz="1300" b="1" i="0" spc="156">
                 <a:solidFill>
-                  <a:srgbClr val="6B4FBB"/>
+                  <a:srgbClr val="3B49A0"/>
                 </a:solidFill>
                 <a:latin typeface="Verdana"/>
               </a:rPr>
@@ -15470,7 +15470,7 @@
             </a:avLst>
           </a:prstGeom>
           <a:solidFill>
-            <a:srgbClr val="EFEAFA"/>
+            <a:srgbClr val="E8EAFA"/>
           </a:solidFill>
           <a:ln>
             <a:noFill/>
@@ -15527,7 +15527,7 @@
             <a:r>
               <a:rPr sz="1500" b="1" i="0">
                 <a:solidFill>
-                  <a:srgbClr val="6B4FBB"/>
+                  <a:srgbClr val="3B49A0"/>
                 </a:solidFill>
                 <a:latin typeface="Verdana"/>
               </a:rPr>
@@ -15647,7 +15647,7 @@
             </a:avLst>
           </a:prstGeom>
           <a:solidFill>
-            <a:srgbClr val="EFEAFA"/>
+            <a:srgbClr val="E8EAFA"/>
           </a:solidFill>
           <a:ln>
             <a:noFill/>
@@ -15704,7 +15704,7 @@
             <a:r>
               <a:rPr sz="1500" b="1" i="0">
                 <a:solidFill>
-                  <a:srgbClr val="6B4FBB"/>
+                  <a:srgbClr val="3B49A0"/>
                 </a:solidFill>
                 <a:latin typeface="Verdana"/>
               </a:rPr>
@@ -15824,7 +15824,7 @@
             </a:avLst>
           </a:prstGeom>
           <a:solidFill>
-            <a:srgbClr val="EFEAFA"/>
+            <a:srgbClr val="E8EAFA"/>
           </a:solidFill>
           <a:ln>
             <a:noFill/>
@@ -15881,7 +15881,7 @@
             <a:r>
               <a:rPr sz="1500" b="1" i="0">
                 <a:solidFill>
-                  <a:srgbClr val="6B4FBB"/>
+                  <a:srgbClr val="3B49A0"/>
                 </a:solidFill>
                 <a:latin typeface="Verdana"/>
               </a:rPr>
@@ -16001,7 +16001,7 @@
             </a:avLst>
           </a:prstGeom>
           <a:solidFill>
-            <a:srgbClr val="EFEAFA"/>
+            <a:srgbClr val="E8EAFA"/>
           </a:solidFill>
           <a:ln>
             <a:noFill/>
@@ -16058,7 +16058,7 @@
             <a:r>
               <a:rPr sz="1500" b="1" i="0">
                 <a:solidFill>
-                  <a:srgbClr val="6B4FBB"/>
+                  <a:srgbClr val="3B49A0"/>
                 </a:solidFill>
                 <a:latin typeface="Verdana"/>
               </a:rPr>
@@ -16178,7 +16178,7 @@
             </a:avLst>
           </a:prstGeom>
           <a:solidFill>
-            <a:srgbClr val="EFEAFA"/>
+            <a:srgbClr val="E8EAFA"/>
           </a:solidFill>
           <a:ln>
             <a:noFill/>
@@ -16235,7 +16235,7 @@
             <a:r>
               <a:rPr sz="1500" b="1" i="0">
                 <a:solidFill>
-                  <a:srgbClr val="6B4FBB"/>
+                  <a:srgbClr val="3B49A0"/>
                 </a:solidFill>
                 <a:latin typeface="Verdana"/>
               </a:rPr>
@@ -16355,7 +16355,7 @@
             </a:avLst>
           </a:prstGeom>
           <a:solidFill>
-            <a:srgbClr val="EFEAFA"/>
+            <a:srgbClr val="E8EAFA"/>
           </a:solidFill>
           <a:ln>
             <a:noFill/>
@@ -16412,7 +16412,7 @@
             <a:r>
               <a:rPr sz="1500" b="1" i="0">
                 <a:solidFill>
-                  <a:srgbClr val="6B4FBB"/>
+                  <a:srgbClr val="3B49A0"/>
                 </a:solidFill>
                 <a:latin typeface="Verdana"/>
               </a:rPr>
@@ -16532,7 +16532,7 @@
             </a:avLst>
           </a:prstGeom>
           <a:solidFill>
-            <a:srgbClr val="EFEAFA"/>
+            <a:srgbClr val="E8EAFA"/>
           </a:solidFill>
           <a:ln>
             <a:noFill/>
@@ -16589,7 +16589,7 @@
             <a:r>
               <a:rPr sz="1500" b="1" i="0">
                 <a:solidFill>
-                  <a:srgbClr val="6B4FBB"/>
+                  <a:srgbClr val="3B49A0"/>
                 </a:solidFill>
                 <a:latin typeface="Verdana"/>
               </a:rPr>
@@ -16709,7 +16709,7 @@
             </a:avLst>
           </a:prstGeom>
           <a:solidFill>
-            <a:srgbClr val="EFEAFA"/>
+            <a:srgbClr val="E8EAFA"/>
           </a:solidFill>
           <a:ln>
             <a:noFill/>
@@ -16766,7 +16766,7 @@
             <a:r>
               <a:rPr sz="1500" b="1" i="0">
                 <a:solidFill>
-                  <a:srgbClr val="6B4FBB"/>
+                  <a:srgbClr val="3B49A0"/>
                 </a:solidFill>
                 <a:latin typeface="Verdana"/>
               </a:rPr>
@@ -16991,7 +16991,7 @@
             <a:r>
               <a:rPr sz="1300" b="1" i="0" spc="156">
                 <a:solidFill>
-                  <a:srgbClr val="6B4FBB"/>
+                  <a:srgbClr val="3B49A0"/>
                 </a:solidFill>
                 <a:latin typeface="Verdana"/>
               </a:rPr>
